--- a/docs/presentation/architecture_overview.pptx
+++ b/docs/presentation/architecture_overview.pptx
@@ -10,12 +10,6 @@
     <p:sldId id="258" r:id="rId9"/>
     <p:sldId id="259" r:id="rId10"/>
     <p:sldId id="260" r:id="rId11"/>
-    <p:sldId id="261" r:id="rId12"/>
-    <p:sldId id="262" r:id="rId13"/>
-    <p:sldId id="263" r:id="rId14"/>
-    <p:sldId id="264" r:id="rId15"/>
-    <p:sldId id="265" r:id="rId16"/>
-    <p:sldId id="266" r:id="rId17"/>
   </p:sldIdLst>
   <p:sldSz cx="12191695" cy="6858000" type="screen4x3"/>
   <p:notesSz cx="6858000" cy="9144000"/>
@@ -3107,7 +3101,7 @@
         <p:spPr>
           <a:xfrm>
             <a:off x="502920" y="292608"/>
-            <a:ext cx="11247120" cy="594360"/>
+            <a:ext cx="11155680" cy="640080"/>
           </a:xfrm>
           <a:prstGeom prst="rect">
             <a:avLst/>
@@ -3129,7 +3123,7 @@
               </a:defRPr>
             </a:pPr>
             <a:r>
-              <a:t>Программный комплекс оценки эффективности энергооборудования</a:t>
+              <a:t>Energy System: финальная архитектура после review v2</a:t>
             </a:r>
           </a:p>
         </p:txBody>
@@ -3143,7 +3137,7 @@
         <p:spPr>
           <a:xfrm>
             <a:off x="548640" y="868680"/>
-            <a:ext cx="10972800" cy="411480"/>
+            <a:ext cx="10972800" cy="365760"/>
           </a:xfrm>
           <a:prstGeom prst="rect">
             <a:avLst/>
@@ -3159,13 +3153,13 @@
             <a:pPr>
               <a:defRPr sz="1400">
                 <a:solidFill>
-                  <a:srgbClr val="5A5A5A"/>
+                  <a:srgbClr val="505050"/>
                 </a:solidFill>
                 <a:latin typeface="Arial"/>
               </a:defRPr>
             </a:pPr>
             <a:r>
-              <a:t>Итоговая архитектура по каждому пункту технического задания</a:t>
+              <a:t>Исправлены новые и старые замечания ревью</a:t>
             </a:r>
           </a:p>
         </p:txBody>
@@ -3178,8 +3172,8 @@
         </p:nvSpPr>
         <p:spPr>
           <a:xfrm>
-            <a:off x="731520" y="1280160"/>
-            <a:ext cx="5029200" cy="5029200"/>
+            <a:off x="731520" y="1234440"/>
+            <a:ext cx="5303520" cy="5303520"/>
           </a:xfrm>
           <a:prstGeom prst="rect">
             <a:avLst/>
@@ -3196,12 +3190,12 @@
               <a:spcAft>
                 <a:spcPts val="700"/>
               </a:spcAft>
-              <a:defRPr sz="2000">
+              <a:defRPr sz="1800">
                 <a:latin typeface="Arial"/>
               </a:defRPr>
             </a:pPr>
             <a:r>
-              <a:t>PyQt6-клиент</a:t>
+              <a:t>FastAPI startup переведен на lifespan</a:t>
             </a:r>
           </a:p>
           <a:p>
@@ -3209,12 +3203,12 @@
               <a:spcAft>
                 <a:spcPts val="700"/>
               </a:spcAft>
-              <a:defRPr sz="2000">
+              <a:defRPr sz="1800">
                 <a:latin typeface="Arial"/>
               </a:defRPr>
             </a:pPr>
             <a:r>
-              <a:t>FastAPI-сервер</a:t>
+              <a:t>DTO CalculationRequest отделена от доменной CalculationInput через mapper</a:t>
             </a:r>
           </a:p>
           <a:p>
@@ -3222,12 +3216,12 @@
               <a:spcAft>
                 <a:spcPts val="700"/>
               </a:spcAft>
-              <a:defRPr sz="2000">
+              <a:defRPr sz="1800">
                 <a:latin typeface="Arial"/>
               </a:defRPr>
             </a:pPr>
             <a:r>
-              <a:t>Расчетное ядро и оркестратор</a:t>
+              <a:t>AuditEvent обновляется через dataclasses.replace()</a:t>
             </a:r>
           </a:p>
           <a:p>
@@ -3235,12 +3229,12 @@
               <a:spcAft>
                 <a:spcPts val="700"/>
               </a:spcAft>
-              <a:defRPr sz="2000">
+              <a:defRPr sz="1800">
                 <a:latin typeface="Arial"/>
               </a:defRPr>
             </a:pPr>
             <a:r>
-              <a:t>SQLite-хранение</a:t>
+              <a:t>SessionManager: cleanup() + _cleanup_unsafe()</a:t>
             </a:r>
           </a:p>
           <a:p>
@@ -3248,12 +3242,12 @@
               <a:spcAft>
                 <a:spcPts val="700"/>
               </a:spcAft>
-              <a:defRPr sz="2000">
+              <a:defRPr sz="1800">
                 <a:latin typeface="Arial"/>
               </a:defRPr>
             </a:pPr>
             <a:r>
-              <a:t>Аутентификация, роли, аудит</a:t>
+              <a:t>Нет global _LOGGER; используется logging.getLogger cache</a:t>
             </a:r>
           </a:p>
           <a:p>
@@ -3261,19 +3255,19 @@
               <a:spcAft>
                 <a:spcPts val="700"/>
               </a:spcAft>
-              <a:defRPr sz="2000">
+              <a:defRPr sz="1800">
                 <a:latin typeface="Arial"/>
               </a:defRPr>
             </a:pPr>
             <a:r>
-              <a:t>UML + демонстрация + тесты</a:t>
+              <a:t>GUI не показывает серверный путь экспортированных файлов</a:t>
             </a:r>
           </a:p>
         </p:txBody>
       </p:sp>
       <p:pic>
         <p:nvPicPr>
-          <p:cNvPr id="5" name="Picture 4" descr="components.png"/>
+          <p:cNvPr id="5" name="Picture 4" descr="components_review_v2.png"/>
           <p:cNvPicPr>
             <a:picLocks noChangeAspect="1"/>
           </p:cNvPicPr>
@@ -3287,311 +3281,14 @@
         </p:blipFill>
         <p:spPr>
           <a:xfrm>
-            <a:off x="5760720" y="1143000"/>
-            <a:ext cx="5760720" cy="1207441"/>
+            <a:off x="5943600" y="1097280"/>
+            <a:ext cx="5486400" cy="1197346"/>
           </a:xfrm>
           <a:prstGeom prst="rect">
             <a:avLst/>
           </a:prstGeom>
         </p:spPr>
       </p:pic>
-    </p:spTree>
-  </p:cSld>
-  <p:clrMapOvr>
-    <a:masterClrMapping/>
-  </p:clrMapOvr>
-</p:sld>
-</file>
-
-<file path=ppt/slides/slide10.xml><?xml version="1.0" encoding="utf-8"?>
-<p:sld xmlns:a="http://schemas.openxmlformats.org/drawingml/2006/main" xmlns:p="http://schemas.openxmlformats.org/presentationml/2006/main" xmlns:r="http://schemas.openxmlformats.org/officeDocument/2006/relationships">
-  <p:cSld>
-    <p:spTree>
-      <p:nvGrpSpPr>
-        <p:cNvPr id="1" name=""/>
-        <p:cNvGrpSpPr/>
-        <p:nvPr/>
-      </p:nvGrpSpPr>
-      <p:grpSpPr/>
-      <p:sp>
-        <p:nvSpPr>
-          <p:cNvPr id="2" name="TextBox 1"/>
-          <p:cNvSpPr txBox="1"/>
-          <p:nvPr/>
-        </p:nvSpPr>
-        <p:spPr>
-          <a:xfrm>
-            <a:off x="502920" y="292608"/>
-            <a:ext cx="11247120" cy="594360"/>
-          </a:xfrm>
-          <a:prstGeom prst="rect">
-            <a:avLst/>
-          </a:prstGeom>
-          <a:noFill/>
-        </p:spPr>
-        <p:txBody>
-          <a:bodyPr wrap="none">
-            <a:spAutoFit/>
-          </a:bodyPr>
-          <a:lstStyle/>
-          <a:p>
-            <a:pPr>
-              <a:defRPr sz="2800" b="1">
-                <a:solidFill>
-                  <a:srgbClr val="1E1E1E"/>
-                </a:solidFill>
-                <a:latin typeface="Arial"/>
-              </a:defRPr>
-            </a:pPr>
-            <a:r>
-              <a:t>Ограничения и указания по применению</a:t>
-            </a:r>
-          </a:p>
-        </p:txBody>
-      </p:sp>
-      <p:sp>
-        <p:nvSpPr>
-          <p:cNvPr id="3" name="TextBox 2"/>
-          <p:cNvSpPr txBox="1"/>
-          <p:nvPr/>
-        </p:nvSpPr>
-        <p:spPr>
-          <a:xfrm>
-            <a:off x="822960" y="1234440"/>
-            <a:ext cx="10789920" cy="5029200"/>
-          </a:xfrm>
-          <a:prstGeom prst="rect">
-            <a:avLst/>
-          </a:prstGeom>
-          <a:noFill/>
-        </p:spPr>
-        <p:txBody>
-          <a:bodyPr wrap="none">
-            <a:spAutoFit/>
-          </a:bodyPr>
-          <a:lstStyle/>
-          <a:p>
-            <a:pPr>
-              <a:spcAft>
-                <a:spcPts val="700"/>
-              </a:spcAft>
-              <a:defRPr sz="2000">
-                <a:latin typeface="Arial"/>
-              </a:defRPr>
-            </a:pPr>
-            <a:r>
-              <a:t>Локальный учебный режим: 127.0.0.1:8000</a:t>
-            </a:r>
-          </a:p>
-          <a:p>
-            <a:pPr>
-              <a:spcAft>
-                <a:spcPts val="700"/>
-              </a:spcAft>
-              <a:defRPr sz="2000">
-                <a:latin typeface="Arial"/>
-              </a:defRPr>
-            </a:pPr>
-            <a:r>
-              <a:t>Для сетевого развертывания включить HTTPS-сертификаты</a:t>
-            </a:r>
-          </a:p>
-          <a:p>
-            <a:pPr>
-              <a:spcAft>
-                <a:spcPts val="700"/>
-              </a:spcAft>
-              <a:defRPr sz="2000">
-                <a:latin typeface="Arial"/>
-              </a:defRPr>
-            </a:pPr>
-            <a:r>
-              <a:t>Модель разрежения в конденсаторе учебная; для промышленного расчета нужны паспортные характеристики оборудования</a:t>
-            </a:r>
-          </a:p>
-          <a:p>
-            <a:pPr>
-              <a:spcAft>
-                <a:spcPts val="700"/>
-              </a:spcAft>
-              <a:defRPr sz="2000">
-                <a:latin typeface="Arial"/>
-              </a:defRPr>
-            </a:pPr>
-            <a:r>
-              <a:t>Аудит не хранит пароли и персональные данные</a:t>
-            </a:r>
-          </a:p>
-          <a:p>
-            <a:pPr>
-              <a:spcAft>
-                <a:spcPts val="700"/>
-              </a:spcAft>
-              <a:defRPr sz="2000">
-                <a:latin typeface="Arial"/>
-              </a:defRPr>
-            </a:pPr>
-            <a:r>
-              <a:t>Глубина хранения и детализация аудита настраиваются</a:t>
-            </a:r>
-          </a:p>
-        </p:txBody>
-      </p:sp>
-    </p:spTree>
-  </p:cSld>
-  <p:clrMapOvr>
-    <a:masterClrMapping/>
-  </p:clrMapOvr>
-</p:sld>
-</file>
-
-<file path=ppt/slides/slide11.xml><?xml version="1.0" encoding="utf-8"?>
-<p:sld xmlns:a="http://schemas.openxmlformats.org/drawingml/2006/main" xmlns:p="http://schemas.openxmlformats.org/presentationml/2006/main" xmlns:r="http://schemas.openxmlformats.org/officeDocument/2006/relationships">
-  <p:cSld>
-    <p:spTree>
-      <p:nvGrpSpPr>
-        <p:cNvPr id="1" name=""/>
-        <p:cNvGrpSpPr/>
-        <p:nvPr/>
-      </p:nvGrpSpPr>
-      <p:grpSpPr/>
-      <p:sp>
-        <p:nvSpPr>
-          <p:cNvPr id="2" name="TextBox 1"/>
-          <p:cNvSpPr txBox="1"/>
-          <p:nvPr/>
-        </p:nvSpPr>
-        <p:spPr>
-          <a:xfrm>
-            <a:off x="502920" y="292608"/>
-            <a:ext cx="11247120" cy="594360"/>
-          </a:xfrm>
-          <a:prstGeom prst="rect">
-            <a:avLst/>
-          </a:prstGeom>
-          <a:noFill/>
-        </p:spPr>
-        <p:txBody>
-          <a:bodyPr wrap="none">
-            <a:spAutoFit/>
-          </a:bodyPr>
-          <a:lstStyle/>
-          <a:p>
-            <a:pPr>
-              <a:defRPr sz="2800" b="1">
-                <a:solidFill>
-                  <a:srgbClr val="1E1E1E"/>
-                </a:solidFill>
-                <a:latin typeface="Arial"/>
-              </a:defRPr>
-            </a:pPr>
-            <a:r>
-              <a:t>Проверка и демонстрация</a:t>
-            </a:r>
-          </a:p>
-        </p:txBody>
-      </p:sp>
-      <p:sp>
-        <p:nvSpPr>
-          <p:cNvPr id="3" name="TextBox 2"/>
-          <p:cNvSpPr txBox="1"/>
-          <p:nvPr/>
-        </p:nvSpPr>
-        <p:spPr>
-          <a:xfrm>
-            <a:off x="822960" y="1234440"/>
-            <a:ext cx="10789920" cy="5029200"/>
-          </a:xfrm>
-          <a:prstGeom prst="rect">
-            <a:avLst/>
-          </a:prstGeom>
-          <a:noFill/>
-        </p:spPr>
-        <p:txBody>
-          <a:bodyPr wrap="none">
-            <a:spAutoFit/>
-          </a:bodyPr>
-          <a:lstStyle/>
-          <a:p>
-            <a:pPr>
-              <a:spcAft>
-                <a:spcPts val="700"/>
-              </a:spcAft>
-              <a:defRPr sz="2200">
-                <a:latin typeface="Arial"/>
-              </a:defRPr>
-            </a:pPr>
-            <a:r>
-              <a:t>Тесты: 18 passed</a:t>
-            </a:r>
-          </a:p>
-          <a:p>
-            <a:pPr>
-              <a:spcAft>
-                <a:spcPts val="700"/>
-              </a:spcAft>
-              <a:defRPr sz="2200">
-                <a:latin typeface="Arial"/>
-              </a:defRPr>
-            </a:pPr>
-            <a:r>
-              <a:t>Сценарий демонстрации: docs/DEMO_SCRIPT.md</a:t>
-            </a:r>
-          </a:p>
-          <a:p>
-            <a:pPr>
-              <a:spcAft>
-                <a:spcPts val="700"/>
-              </a:spcAft>
-              <a:defRPr sz="2200">
-                <a:latin typeface="Arial"/>
-              </a:defRPr>
-            </a:pPr>
-            <a:r>
-              <a:t>Детальный чек-лист ТЗ: docs/TZ_CHECKLIST.md</a:t>
-            </a:r>
-          </a:p>
-          <a:p>
-            <a:pPr>
-              <a:spcAft>
-                <a:spcPts val="700"/>
-              </a:spcAft>
-              <a:defRPr sz="2200">
-                <a:latin typeface="Arial"/>
-              </a:defRPr>
-            </a:pPr>
-            <a:r>
-              <a:t>UML-диаграммы: docs/uml/*.puml</a:t>
-            </a:r>
-          </a:p>
-          <a:p>
-            <a:pPr>
-              <a:spcAft>
-                <a:spcPts val="700"/>
-              </a:spcAft>
-              <a:defRPr sz="2200">
-                <a:latin typeface="Arial"/>
-              </a:defRPr>
-            </a:pPr>
-            <a:r>
-              <a:t>Запуск API: python main.py api</a:t>
-            </a:r>
-          </a:p>
-          <a:p>
-            <a:pPr>
-              <a:spcAft>
-                <a:spcPts val="700"/>
-              </a:spcAft>
-              <a:defRPr sz="2200">
-                <a:latin typeface="Arial"/>
-              </a:defRPr>
-            </a:pPr>
-            <a:r>
-              <a:t>Запуск GUI: python main.py gui</a:t>
-            </a:r>
-          </a:p>
-        </p:txBody>
-      </p:sp>
     </p:spTree>
   </p:cSld>
   <p:clrMapOvr>
@@ -3619,7 +3316,7 @@
         <p:spPr>
           <a:xfrm>
             <a:off x="502920" y="292608"/>
-            <a:ext cx="11247120" cy="594360"/>
+            <a:ext cx="11155680" cy="640080"/>
           </a:xfrm>
           <a:prstGeom prst="rect">
             <a:avLst/>
@@ -3641,161 +3338,35 @@
               </a:defRPr>
             </a:pPr>
             <a:r>
-              <a:t>Назначение и сценарии использования</a:t>
-            </a:r>
-          </a:p>
-        </p:txBody>
-      </p:sp>
-      <p:sp>
-        <p:nvSpPr>
-          <p:cNvPr id="3" name="TextBox 2"/>
-          <p:cNvSpPr txBox="1"/>
+              <a:t>Сводка исправлений review v2</a:t>
+            </a:r>
+          </a:p>
+        </p:txBody>
+      </p:sp>
+      <p:pic>
+        <p:nvPicPr>
+          <p:cNvPr id="3" name="Picture 2" descr="review_v2_fixes.png"/>
+          <p:cNvPicPr>
+            <a:picLocks noChangeAspect="1"/>
+          </p:cNvPicPr>
           <p:nvPr/>
-        </p:nvSpPr>
+        </p:nvPicPr>
+        <p:blipFill>
+          <a:blip r:embed="rId2"/>
+          <a:stretch>
+            <a:fillRect/>
+          </a:stretch>
+        </p:blipFill>
         <p:spPr>
           <a:xfrm>
-            <a:off x="731520" y="1234440"/>
-            <a:ext cx="5577840" cy="5029200"/>
+            <a:off x="822960" y="1143000"/>
+            <a:ext cx="10607040" cy="11144922"/>
           </a:xfrm>
           <a:prstGeom prst="rect">
             <a:avLst/>
           </a:prstGeom>
-          <a:noFill/>
         </p:spPr>
-        <p:txBody>
-          <a:bodyPr wrap="none">
-            <a:spAutoFit/>
-          </a:bodyPr>
-          <a:lstStyle/>
-          <a:p>
-            <a:pPr>
-              <a:spcAft>
-                <a:spcPts val="700"/>
-              </a:spcAft>
-              <a:defRPr sz="1900">
-                <a:latin typeface="Arial"/>
-              </a:defRPr>
-            </a:pPr>
-            <a:r>
-              <a:t>Оперативный расчет режимов работы ТЭС</a:t>
-            </a:r>
-          </a:p>
-          <a:p>
-            <a:pPr>
-              <a:spcAft>
-                <a:spcPts val="700"/>
-              </a:spcAft>
-              <a:defRPr sz="1900">
-                <a:latin typeface="Arial"/>
-              </a:defRPr>
-            </a:pPr>
-            <a:r>
-              <a:t>Учет нагрузки, блоков, температуры, влажности, направления и скорости ветра</a:t>
-            </a:r>
-          </a:p>
-          <a:p>
-            <a:pPr>
-              <a:spcAft>
-                <a:spcPts val="700"/>
-              </a:spcAft>
-              <a:defRPr sz="1900">
-                <a:latin typeface="Arial"/>
-              </a:defRPr>
-            </a:pPr>
-            <a:r>
-              <a:t>Оптимизация количества блоков и разрежения в конденсаторе</a:t>
-            </a:r>
-          </a:p>
-          <a:p>
-            <a:pPr>
-              <a:spcAft>
-                <a:spcPts val="700"/>
-              </a:spcAft>
-              <a:defRPr sz="1900">
-                <a:latin typeface="Arial"/>
-              </a:defRPr>
-            </a:pPr>
-            <a:r>
-              <a:t>Визуализация теплоотводящей способности от температуры</a:t>
-            </a:r>
-          </a:p>
-          <a:p>
-            <a:pPr>
-              <a:spcAft>
-                <a:spcPts val="700"/>
-              </a:spcAft>
-              <a:defRPr sz="1900">
-                <a:latin typeface="Arial"/>
-              </a:defRPr>
-            </a:pPr>
-            <a:r>
-              <a:t>Экспорт результатов и демонстрация</a:t>
-            </a:r>
-          </a:p>
-        </p:txBody>
-      </p:sp>
-      <p:sp>
-        <p:nvSpPr>
-          <p:cNvPr id="4" name="TextBox 3"/>
-          <p:cNvSpPr txBox="1"/>
-          <p:nvPr/>
-        </p:nvSpPr>
-        <p:spPr>
-          <a:xfrm>
-            <a:off x="6492240" y="1234440"/>
-            <a:ext cx="4937760" cy="5029200"/>
-          </a:xfrm>
-          <a:prstGeom prst="rect">
-            <a:avLst/>
-          </a:prstGeom>
-          <a:noFill/>
-        </p:spPr>
-        <p:txBody>
-          <a:bodyPr wrap="none">
-            <a:spAutoFit/>
-          </a:bodyPr>
-          <a:lstStyle/>
-          <a:p>
-            <a:pPr>
-              <a:spcAft>
-                <a:spcPts val="700"/>
-              </a:spcAft>
-              <a:defRPr sz="1900">
-                <a:latin typeface="Arial"/>
-              </a:defRPr>
-            </a:pPr>
-            <a:r>
-              <a:t>Пользователь: расчет, графики, экспорт, смена пароля</a:t>
-            </a:r>
-          </a:p>
-          <a:p>
-            <a:pPr>
-              <a:spcAft>
-                <a:spcPts val="700"/>
-              </a:spcAft>
-              <a:defRPr sz="1900">
-                <a:latin typeface="Arial"/>
-              </a:defRPr>
-            </a:pPr>
-            <a:r>
-              <a:t>Администратор: пользователи, роли, политика безопасности, аудит</a:t>
-            </a:r>
-          </a:p>
-          <a:p>
-            <a:pPr>
-              <a:spcAft>
-                <a:spcPts val="700"/>
-              </a:spcAft>
-              <a:defRPr sz="1900">
-                <a:latin typeface="Arial"/>
-              </a:defRPr>
-            </a:pPr>
-            <a:r>
-              <a:t>Все административные действия логируются</a:t>
-            </a:r>
-          </a:p>
-        </p:txBody>
-      </p:sp>
+      </p:pic>
     </p:spTree>
   </p:cSld>
   <p:clrMapOvr>
@@ -3823,7 +3394,7 @@
         <p:spPr>
           <a:xfrm>
             <a:off x="502920" y="292608"/>
-            <a:ext cx="11247120" cy="594360"/>
+            <a:ext cx="11155680" cy="640080"/>
           </a:xfrm>
           <a:prstGeom prst="rect">
             <a:avLst/>
@@ -3845,14 +3416,14 @@
               </a:defRPr>
             </a:pPr>
             <a:r>
-              <a:t>Компонентная архитектура</a:t>
+              <a:t>Обновленная компонентная схема</a:t>
             </a:r>
           </a:p>
         </p:txBody>
       </p:sp>
       <p:pic>
         <p:nvPicPr>
-          <p:cNvPr id="3" name="Picture 2" descr="components.png"/>
+          <p:cNvPr id="3" name="Picture 2" descr="components_review_v2.png"/>
           <p:cNvPicPr>
             <a:picLocks noChangeAspect="1"/>
           </p:cNvPicPr>
@@ -3867,7 +3438,7 @@
         <p:spPr>
           <a:xfrm>
             <a:off x="640080" y="1143000"/>
-            <a:ext cx="10972800" cy="2299888"/>
+            <a:ext cx="10972800" cy="2394693"/>
           </a:xfrm>
           <a:prstGeom prst="rect">
             <a:avLst/>
@@ -3901,7 +3472,7 @@
         <p:spPr>
           <a:xfrm>
             <a:off x="502920" y="292608"/>
-            <a:ext cx="11247120" cy="594360"/>
+            <a:ext cx="11155680" cy="640080"/>
           </a:xfrm>
           <a:prstGeom prst="rect">
             <a:avLst/>
@@ -3923,7 +3494,7 @@
               </a:defRPr>
             </a:pPr>
             <a:r>
-              <a:t>Расчетное ядро и выходные показатели</a:t>
+              <a:t>Безопасность и поддерживаемость</a:t>
             </a:r>
           </a:p>
         </p:txBody>
@@ -3936,8 +3507,8 @@
         </p:nvSpPr>
         <p:spPr>
           <a:xfrm>
-            <a:off x="731520" y="1188720"/>
-            <a:ext cx="10789920" cy="5029200"/>
+            <a:off x="822960" y="1325880"/>
+            <a:ext cx="10515600" cy="5303520"/>
           </a:xfrm>
           <a:prstGeom prst="rect">
             <a:avLst/>
@@ -3954,12 +3525,12 @@
               <a:spcAft>
                 <a:spcPts val="700"/>
               </a:spcAft>
-              <a:defRPr sz="2000">
+              <a:defRPr sz="2200">
                 <a:latin typeface="Arial"/>
               </a:defRPr>
             </a:pPr>
             <a:r>
-              <a:t>Вход: нагрузка ТЭС, число блоков, номинальная мощность и КПД</a:t>
+              <a:t>Пароли не захардкожены и не логируются.</a:t>
             </a:r>
           </a:p>
           <a:p>
@@ -3967,12 +3538,12 @@
               <a:spcAft>
                 <a:spcPts val="700"/>
               </a:spcAft>
-              <a:defRPr sz="2000">
+              <a:defRPr sz="2200">
                 <a:latin typeface="Arial"/>
               </a:defRPr>
             </a:pPr>
             <a:r>
-              <a:t>Внешние факторы: температура, влажность, скорость и направление ветра</a:t>
+              <a:t>Аудит пишется через единую модель AuditEvent.</a:t>
             </a:r>
           </a:p>
           <a:p>
@@ -3980,12 +3551,12 @@
               <a:spcAft>
                 <a:spcPts val="700"/>
               </a:spcAft>
-              <a:defRPr sz="2000">
+              <a:defRPr sz="2200">
                 <a:latin typeface="Arial"/>
               </a:defRPr>
             </a:pPr>
             <a:r>
-              <a:t>Расчет: КПД блока, КПД ТЭС брутто/нетто, собственные нужды</a:t>
+              <a:t>Rate limit явно документирован как per-process.</a:t>
             </a:r>
           </a:p>
           <a:p>
@@ -3993,12 +3564,12 @@
               <a:spcAft>
                 <a:spcPts val="700"/>
               </a:spcAft>
-              <a:defRPr sz="2000">
+              <a:defRPr sz="2200">
                 <a:latin typeface="Arial"/>
               </a:defRPr>
             </a:pPr>
             <a:r>
-              <a:t>Оптимизация: блоки и разрежение в конденсаторе</a:t>
+              <a:t>Публичные модули имеют __all__.</a:t>
             </a:r>
           </a:p>
           <a:p>
@@ -4006,12 +3577,12 @@
               <a:spcAft>
                 <a:spcPts val="700"/>
               </a:spcAft>
-              <a:defRPr sz="2000">
+              <a:defRPr sz="2200">
                 <a:latin typeface="Arial"/>
               </a:defRPr>
             </a:pPr>
             <a:r>
-              <a:t>Тесты расчетного ядра находятся в tests/test_calculation.py</a:t>
+              <a:t>pyproject.toml настраивает pytest.</a:t>
             </a:r>
           </a:p>
         </p:txBody>
@@ -4043,7 +3614,7 @@
         <p:spPr>
           <a:xfrm>
             <a:off x="502920" y="292608"/>
-            <a:ext cx="11247120" cy="594360"/>
+            <a:ext cx="11155680" cy="640080"/>
           </a:xfrm>
           <a:prstGeom prst="rect">
             <a:avLst/>
@@ -4065,45 +3636,21 @@
               </a:defRPr>
             </a:pPr>
             <a:r>
-              <a:t>Аутентификация, роли и администрирование</a:t>
-            </a:r>
-          </a:p>
-        </p:txBody>
-      </p:sp>
-      <p:pic>
-        <p:nvPicPr>
-          <p:cNvPr id="3" name="Picture 2" descr="security.png"/>
-          <p:cNvPicPr>
-            <a:picLocks noChangeAspect="1"/>
-          </p:cNvPicPr>
+              <a:t>Проверка</a:t>
+            </a:r>
+          </a:p>
+        </p:txBody>
+      </p:sp>
+      <p:sp>
+        <p:nvSpPr>
+          <p:cNvPr id="3" name="TextBox 2"/>
+          <p:cNvSpPr txBox="1"/>
           <p:nvPr/>
-        </p:nvPicPr>
-        <p:blipFill>
-          <a:blip r:embed="rId2"/>
-          <a:stretch>
-            <a:fillRect/>
-          </a:stretch>
-        </p:blipFill>
+        </p:nvSpPr>
         <p:spPr>
           <a:xfrm>
-            <a:off x="640080" y="1143000"/>
-            <a:ext cx="10972800" cy="2185988"/>
-          </a:xfrm>
-          <a:prstGeom prst="rect">
-            <a:avLst/>
-          </a:prstGeom>
-        </p:spPr>
-      </p:pic>
-      <p:sp>
-        <p:nvSpPr>
-          <p:cNvPr id="4" name="TextBox 3"/>
-          <p:cNvSpPr txBox="1"/>
-          <p:nvPr/>
-        </p:nvSpPr>
-        <p:spPr>
-          <a:xfrm>
-            <a:off x="822960" y="5897880"/>
-            <a:ext cx="10789920" cy="5029200"/>
+            <a:off x="822960" y="1463040"/>
+            <a:ext cx="10515600" cy="5303520"/>
           </a:xfrm>
           <a:prstGeom prst="rect">
             <a:avLst/>
@@ -4120,180 +3667,25 @@
               <a:spcAft>
                 <a:spcPts val="700"/>
               </a:spcAft>
-              <a:defRPr sz="1400">
+              <a:defRPr sz="2300">
                 <a:latin typeface="Arial"/>
               </a:defRPr>
             </a:pPr>
             <a:r>
-              <a:t>Параметры политики настраиваются через ENERGY_AUTH_*; администратор видит их в GUI.</a:t>
-            </a:r>
-          </a:p>
-        </p:txBody>
-      </p:sp>
-    </p:spTree>
-  </p:cSld>
-  <p:clrMapOvr>
-    <a:masterClrMapping/>
-  </p:clrMapOvr>
-</p:sld>
-</file>
-
-<file path=ppt/slides/slide6.xml><?xml version="1.0" encoding="utf-8"?>
-<p:sld xmlns:a="http://schemas.openxmlformats.org/drawingml/2006/main" xmlns:p="http://schemas.openxmlformats.org/presentationml/2006/main" xmlns:r="http://schemas.openxmlformats.org/officeDocument/2006/relationships">
-  <p:cSld>
-    <p:spTree>
-      <p:nvGrpSpPr>
-        <p:cNvPr id="1" name=""/>
-        <p:cNvGrpSpPr/>
-        <p:nvPr/>
-      </p:nvGrpSpPr>
-      <p:grpSpPr/>
-      <p:sp>
-        <p:nvSpPr>
-          <p:cNvPr id="2" name="TextBox 1"/>
-          <p:cNvSpPr txBox="1"/>
-          <p:nvPr/>
-        </p:nvSpPr>
-        <p:spPr>
-          <a:xfrm>
-            <a:off x="502920" y="292608"/>
-            <a:ext cx="11247120" cy="594360"/>
-          </a:xfrm>
-          <a:prstGeom prst="rect">
-            <a:avLst/>
-          </a:prstGeom>
-          <a:noFill/>
-        </p:spPr>
-        <p:txBody>
-          <a:bodyPr wrap="none">
-            <a:spAutoFit/>
-          </a:bodyPr>
-          <a:lstStyle/>
-          <a:p>
-            <a:pPr>
-              <a:defRPr sz="2800" b="1">
-                <a:solidFill>
-                  <a:srgbClr val="1E1E1E"/>
-                </a:solidFill>
-                <a:latin typeface="Arial"/>
-              </a:defRPr>
-            </a:pPr>
-            <a:r>
-              <a:t>Аудит и логирование</a:t>
-            </a:r>
-          </a:p>
-        </p:txBody>
-      </p:sp>
-      <p:pic>
-        <p:nvPicPr>
-          <p:cNvPr id="3" name="Picture 2" descr="audit.png"/>
-          <p:cNvPicPr>
-            <a:picLocks noChangeAspect="1"/>
-          </p:cNvPicPr>
-          <p:nvPr/>
-        </p:nvPicPr>
-        <p:blipFill>
-          <a:blip r:embed="rId2"/>
-          <a:stretch>
-            <a:fillRect/>
-          </a:stretch>
-        </p:blipFill>
-        <p:spPr>
-          <a:xfrm>
-            <a:off x="640080" y="1143000"/>
-            <a:ext cx="10972800" cy="3537114"/>
-          </a:xfrm>
-          <a:prstGeom prst="rect">
-            <a:avLst/>
-          </a:prstGeom>
-        </p:spPr>
-      </p:pic>
-    </p:spTree>
-  </p:cSld>
-  <p:clrMapOvr>
-    <a:masterClrMapping/>
-  </p:clrMapOvr>
-</p:sld>
-</file>
-
-<file path=ppt/slides/slide7.xml><?xml version="1.0" encoding="utf-8"?>
-<p:sld xmlns:a="http://schemas.openxmlformats.org/drawingml/2006/main" xmlns:p="http://schemas.openxmlformats.org/presentationml/2006/main" xmlns:r="http://schemas.openxmlformats.org/officeDocument/2006/relationships">
-  <p:cSld>
-    <p:spTree>
-      <p:nvGrpSpPr>
-        <p:cNvPr id="1" name=""/>
-        <p:cNvGrpSpPr/>
-        <p:nvPr/>
-      </p:nvGrpSpPr>
-      <p:grpSpPr/>
-      <p:sp>
-        <p:nvSpPr>
-          <p:cNvPr id="2" name="TextBox 1"/>
-          <p:cNvSpPr txBox="1"/>
-          <p:nvPr/>
-        </p:nvSpPr>
-        <p:spPr>
-          <a:xfrm>
-            <a:off x="502920" y="292608"/>
-            <a:ext cx="11247120" cy="594360"/>
-          </a:xfrm>
-          <a:prstGeom prst="rect">
-            <a:avLst/>
-          </a:prstGeom>
-          <a:noFill/>
-        </p:spPr>
-        <p:txBody>
-          <a:bodyPr wrap="none">
-            <a:spAutoFit/>
-          </a:bodyPr>
-          <a:lstStyle/>
-          <a:p>
-            <a:pPr>
-              <a:defRPr sz="2800" b="1">
-                <a:solidFill>
-                  <a:srgbClr val="1E1E1E"/>
-                </a:solidFill>
-                <a:latin typeface="Arial"/>
-              </a:defRPr>
-            </a:pPr>
-            <a:r>
-              <a:t>Интеграционные потоки и безопасность</a:t>
-            </a:r>
-          </a:p>
-        </p:txBody>
-      </p:sp>
-      <p:sp>
-        <p:nvSpPr>
-          <p:cNvPr id="3" name="TextBox 2"/>
-          <p:cNvSpPr txBox="1"/>
-          <p:nvPr/>
-        </p:nvSpPr>
-        <p:spPr>
-          <a:xfrm>
-            <a:off x="777240" y="1234440"/>
-            <a:ext cx="10698480" cy="5029200"/>
-          </a:xfrm>
-          <a:prstGeom prst="rect">
-            <a:avLst/>
-          </a:prstGeom>
-          <a:noFill/>
-        </p:spPr>
-        <p:txBody>
-          <a:bodyPr wrap="none">
-            <a:spAutoFit/>
-          </a:bodyPr>
-          <a:lstStyle/>
+              <a:t>PYTHONPATH=. pytest -q</a:t>
+            </a:r>
+          </a:p>
           <a:p>
             <a:pPr>
               <a:spcAft>
                 <a:spcPts val="700"/>
               </a:spcAft>
-              <a:defRPr sz="2000">
+              <a:defRPr sz="2300">
                 <a:latin typeface="Arial"/>
               </a:defRPr>
             </a:pPr>
             <a:r>
-              <a:t>Идентификация сторон: сессионный токен и роль пользователя</a:t>
+              <a:t>Результат: 30 passed</a:t>
             </a:r>
           </a:p>
           <a:p>
@@ -4301,310 +3693,12 @@
               <a:spcAft>
                 <a:spcPts val="700"/>
               </a:spcAft>
-              <a:defRPr sz="2000">
+              <a:defRPr sz="2300">
                 <a:latin typeface="Arial"/>
               </a:defRPr>
             </a:pPr>
             <a:r>
-              <a:t>Подтверждение приема: HTTP-коды, JSON-ответы, history_id</a:t>
-            </a:r>
-          </a:p>
-          <a:p>
-            <a:pPr>
-              <a:spcAft>
-                <a:spcPts val="700"/>
-              </a:spcAft>
-              <a:defRPr sz="2000">
-                <a:latin typeface="Arial"/>
-              </a:defRPr>
-            </a:pPr>
-            <a:r>
-              <a:t>Целостность: Pydantic-валидация API и валидаторы расчетного ядра</a:t>
-            </a:r>
-          </a:p>
-          <a:p>
-            <a:pPr>
-              <a:spcAft>
-                <a:spcPts val="700"/>
-              </a:spcAft>
-              <a:defRPr sz="2000">
-                <a:latin typeface="Arial"/>
-              </a:defRPr>
-            </a:pPr>
-            <a:r>
-              <a:t>Конфиденциальность: пароли PBKDF2, чувствительные заголовки маскируются</a:t>
-            </a:r>
-          </a:p>
-          <a:p>
-            <a:pPr>
-              <a:spcAft>
-                <a:spcPts val="700"/>
-              </a:spcAft>
-              <a:defRPr sz="2000">
-                <a:latin typeface="Arial"/>
-              </a:defRPr>
-            </a:pPr>
-            <a:r>
-              <a:t>Для сети поддержан HTTPS через ENERGY_API_SSL_CERTFILE/KEYFILE</a:t>
-            </a:r>
-          </a:p>
-          <a:p>
-            <a:pPr>
-              <a:spcAft>
-                <a:spcPts val="700"/>
-              </a:spcAft>
-              <a:defRPr sz="2000">
-                <a:latin typeface="Arial"/>
-              </a:defRPr>
-            </a:pPr>
-            <a:r>
-              <a:t>Доступность: rate limit ENERGY_RATE_LIMIT_PER_MINUTE</a:t>
-            </a:r>
-          </a:p>
-        </p:txBody>
-      </p:sp>
-    </p:spTree>
-  </p:cSld>
-  <p:clrMapOvr>
-    <a:masterClrMapping/>
-  </p:clrMapOvr>
-</p:sld>
-</file>
-
-<file path=ppt/slides/slide8.xml><?xml version="1.0" encoding="utf-8"?>
-<p:sld xmlns:a="http://schemas.openxmlformats.org/drawingml/2006/main" xmlns:p="http://schemas.openxmlformats.org/presentationml/2006/main" xmlns:r="http://schemas.openxmlformats.org/officeDocument/2006/relationships">
-  <p:cSld>
-    <p:spTree>
-      <p:nvGrpSpPr>
-        <p:cNvPr id="1" name=""/>
-        <p:cNvGrpSpPr/>
-        <p:nvPr/>
-      </p:nvGrpSpPr>
-      <p:grpSpPr/>
-      <p:sp>
-        <p:nvSpPr>
-          <p:cNvPr id="2" name="TextBox 1"/>
-          <p:cNvSpPr txBox="1"/>
-          <p:nvPr/>
-        </p:nvSpPr>
-        <p:spPr>
-          <a:xfrm>
-            <a:off x="502920" y="292608"/>
-            <a:ext cx="11247120" cy="594360"/>
-          </a:xfrm>
-          <a:prstGeom prst="rect">
-            <a:avLst/>
-          </a:prstGeom>
-          <a:noFill/>
-        </p:spPr>
-        <p:txBody>
-          <a:bodyPr wrap="none">
-            <a:spAutoFit/>
-          </a:bodyPr>
-          <a:lstStyle/>
-          <a:p>
-            <a:pPr>
-              <a:defRPr sz="2800" b="1">
-                <a:solidFill>
-                  <a:srgbClr val="1E1E1E"/>
-                </a:solidFill>
-                <a:latin typeface="Arial"/>
-              </a:defRPr>
-            </a:pPr>
-            <a:r>
-              <a:t>Среда функционирования и развертывание</a:t>
-            </a:r>
-          </a:p>
-        </p:txBody>
-      </p:sp>
-      <p:pic>
-        <p:nvPicPr>
-          <p:cNvPr id="3" name="Picture 2" descr="deployment.png"/>
-          <p:cNvPicPr>
-            <a:picLocks noChangeAspect="1"/>
-          </p:cNvPicPr>
-          <p:nvPr/>
-        </p:nvPicPr>
-        <p:blipFill>
-          <a:blip r:embed="rId2"/>
-          <a:stretch>
-            <a:fillRect/>
-          </a:stretch>
-        </p:blipFill>
-        <p:spPr>
-          <a:xfrm>
-            <a:off x="822960" y="1143000"/>
-            <a:ext cx="10607040" cy="2638514"/>
-          </a:xfrm>
-          <a:prstGeom prst="rect">
-            <a:avLst/>
-          </a:prstGeom>
-        </p:spPr>
-      </p:pic>
-    </p:spTree>
-  </p:cSld>
-  <p:clrMapOvr>
-    <a:masterClrMapping/>
-  </p:clrMapOvr>
-</p:sld>
-</file>
-
-<file path=ppt/slides/slide9.xml><?xml version="1.0" encoding="utf-8"?>
-<p:sld xmlns:a="http://schemas.openxmlformats.org/drawingml/2006/main" xmlns:p="http://schemas.openxmlformats.org/presentationml/2006/main" xmlns:r="http://schemas.openxmlformats.org/officeDocument/2006/relationships">
-  <p:cSld>
-    <p:spTree>
-      <p:nvGrpSpPr>
-        <p:cNvPr id="1" name=""/>
-        <p:cNvGrpSpPr/>
-        <p:nvPr/>
-      </p:nvGrpSpPr>
-      <p:grpSpPr/>
-      <p:sp>
-        <p:nvSpPr>
-          <p:cNvPr id="2" name="TextBox 1"/>
-          <p:cNvSpPr txBox="1"/>
-          <p:nvPr/>
-        </p:nvSpPr>
-        <p:spPr>
-          <a:xfrm>
-            <a:off x="502920" y="292608"/>
-            <a:ext cx="11247120" cy="594360"/>
-          </a:xfrm>
-          <a:prstGeom prst="rect">
-            <a:avLst/>
-          </a:prstGeom>
-          <a:noFill/>
-        </p:spPr>
-        <p:txBody>
-          <a:bodyPr wrap="none">
-            <a:spAutoFit/>
-          </a:bodyPr>
-          <a:lstStyle/>
-          <a:p>
-            <a:pPr>
-              <a:defRPr sz="2800" b="1">
-                <a:solidFill>
-                  <a:srgbClr val="1E1E1E"/>
-                </a:solidFill>
-                <a:latin typeface="Arial"/>
-              </a:defRPr>
-            </a:pPr>
-            <a:r>
-              <a:t>Подсистемы и модули</a:t>
-            </a:r>
-          </a:p>
-        </p:txBody>
-      </p:sp>
-      <p:sp>
-        <p:nvSpPr>
-          <p:cNvPr id="3" name="TextBox 2"/>
-          <p:cNvSpPr txBox="1"/>
-          <p:nvPr/>
-        </p:nvSpPr>
-        <p:spPr>
-          <a:xfrm>
-            <a:off x="822960" y="1143000"/>
-            <a:ext cx="10789920" cy="5029200"/>
-          </a:xfrm>
-          <a:prstGeom prst="rect">
-            <a:avLst/>
-          </a:prstGeom>
-          <a:noFill/>
-        </p:spPr>
-        <p:txBody>
-          <a:bodyPr wrap="none">
-            <a:spAutoFit/>
-          </a:bodyPr>
-          <a:lstStyle/>
-          <a:p>
-            <a:pPr>
-              <a:spcAft>
-                <a:spcPts val="700"/>
-              </a:spcAft>
-              <a:defRPr sz="2100">
-                <a:latin typeface="Arial"/>
-              </a:defRPr>
-            </a:pPr>
-            <a:r>
-              <a:t>client — PyQt6 GUI</a:t>
-            </a:r>
-          </a:p>
-          <a:p>
-            <a:pPr>
-              <a:spcAft>
-                <a:spcPts val="700"/>
-              </a:spcAft>
-              <a:defRPr sz="2100">
-                <a:latin typeface="Arial"/>
-              </a:defRPr>
-            </a:pPr>
-            <a:r>
-              <a:t>server — FastAPI, маршруты, rate limit</a:t>
-            </a:r>
-          </a:p>
-          <a:p>
-            <a:pPr>
-              <a:spcAft>
-                <a:spcPts val="700"/>
-              </a:spcAft>
-              <a:defRPr sz="2100">
-                <a:latin typeface="Arial"/>
-              </a:defRPr>
-            </a:pPr>
-            <a:r>
-              <a:t>auth — пользователи, пароли, сессии, роли</a:t>
-            </a:r>
-          </a:p>
-          <a:p>
-            <a:pPr>
-              <a:spcAft>
-                <a:spcPts val="700"/>
-              </a:spcAft>
-              <a:defRPr sz="2100">
-                <a:latin typeface="Arial"/>
-              </a:defRPr>
-            </a:pPr>
-            <a:r>
-              <a:t>calculation — формулы, ядро, оптимизация, оркестратор</a:t>
-            </a:r>
-          </a:p>
-          <a:p>
-            <a:pPr>
-              <a:spcAft>
-                <a:spcPts val="700"/>
-              </a:spcAft>
-              <a:defRPr sz="2100">
-                <a:latin typeface="Arial"/>
-              </a:defRPr>
-            </a:pPr>
-            <a:r>
-              <a:t>storage — SQLite и репозитории</a:t>
-            </a:r>
-          </a:p>
-          <a:p>
-            <a:pPr>
-              <a:spcAft>
-                <a:spcPts val="700"/>
-              </a:spcAft>
-              <a:defRPr sz="2100">
-                <a:latin typeface="Arial"/>
-              </a:defRPr>
-            </a:pPr>
-            <a:r>
-              <a:t>audit — журнал, ротация, удаленная отправка</a:t>
-            </a:r>
-          </a:p>
-          <a:p>
-            <a:pPr>
-              <a:spcAft>
-                <a:spcPts val="700"/>
-              </a:spcAft>
-              <a:defRPr sz="2100">
-                <a:latin typeface="Arial"/>
-              </a:defRPr>
-            </a:pPr>
-            <a:r>
-              <a:t>reporting — CSV/PPTX/графики</a:t>
+              <a:t>Проверено отсутствие deprecated on_event, global _LOGGER, payload.to_input(), result['path'] в GUI.</a:t>
             </a:r>
           </a:p>
         </p:txBody>

--- a/docs/presentation/architecture_overview.pptx
+++ b/docs/presentation/architecture_overview.pptx
@@ -10,6 +10,8 @@
     <p:sldId id="258" r:id="rId9"/>
     <p:sldId id="259" r:id="rId10"/>
     <p:sldId id="260" r:id="rId11"/>
+    <p:sldId id="261" r:id="rId12"/>
+    <p:sldId id="262" r:id="rId13"/>
   </p:sldIdLst>
   <p:sldSz cx="12191695" cy="6858000" type="screen4x3"/>
   <p:notesSz cx="6858000" cy="9144000"/>
@@ -3699,6 +3701,777 @@
             </a:pPr>
             <a:r>
               <a:t>Проверено отсутствие deprecated on_event, global _LOGGER, payload.to_input(), result['path'] в GUI.</a:t>
+            </a:r>
+          </a:p>
+        </p:txBody>
+      </p:sp>
+    </p:spTree>
+  </p:cSld>
+  <p:clrMapOvr>
+    <a:masterClrMapping/>
+  </p:clrMapOvr>
+</p:sld>
+</file>
+
+<file path=ppt/slides/slide6.xml><?xml version="1.0" encoding="utf-8"?>
+<p:sld xmlns:a="http://schemas.openxmlformats.org/drawingml/2006/main" xmlns:p="http://schemas.openxmlformats.org/presentationml/2006/main" xmlns:r="http://schemas.openxmlformats.org/officeDocument/2006/relationships">
+  <p:cSld>
+    <p:spTree>
+      <p:nvGrpSpPr>
+        <p:cNvPr id="1" name=""/>
+        <p:cNvGrpSpPr/>
+        <p:nvPr/>
+      </p:nvGrpSpPr>
+      <p:grpSpPr/>
+      <p:sp>
+        <p:nvSpPr>
+          <p:cNvPr id="2" name="TextBox 1"/>
+          <p:cNvSpPr txBox="1"/>
+          <p:nvPr/>
+        </p:nvSpPr>
+        <p:spPr>
+          <a:xfrm>
+            <a:off x="502920" y="256032"/>
+            <a:ext cx="11155680" cy="594360"/>
+          </a:xfrm>
+          <a:prstGeom prst="rect">
+            <a:avLst/>
+          </a:prstGeom>
+          <a:noFill/>
+        </p:spPr>
+        <p:txBody>
+          <a:bodyPr wrap="none">
+            <a:spAutoFit/>
+          </a:bodyPr>
+          <a:lstStyle/>
+          <a:p>
+            <a:pPr>
+              <a:defRPr sz="2700" b="1">
+                <a:solidFill>
+                  <a:srgbClr val="1E1E1E"/>
+                </a:solidFill>
+                <a:latin typeface="Arial"/>
+              </a:defRPr>
+            </a:pPr>
+            <a:r>
+              <a:t>Сетевые порты и протоколы</a:t>
+            </a:r>
+          </a:p>
+        </p:txBody>
+      </p:sp>
+      <p:sp>
+        <p:nvSpPr>
+          <p:cNvPr id="3" name="TextBox 2"/>
+          <p:cNvSpPr txBox="1"/>
+          <p:nvPr/>
+        </p:nvSpPr>
+        <p:spPr>
+          <a:xfrm>
+            <a:off x="548640" y="841248"/>
+            <a:ext cx="10972800" cy="365760"/>
+          </a:xfrm>
+          <a:prstGeom prst="rect">
+            <a:avLst/>
+          </a:prstGeom>
+          <a:noFill/>
+        </p:spPr>
+        <p:txBody>
+          <a:bodyPr wrap="none">
+            <a:spAutoFit/>
+          </a:bodyPr>
+          <a:lstStyle/>
+          <a:p>
+            <a:pPr>
+              <a:defRPr sz="1400">
+                <a:solidFill>
+                  <a:srgbClr val="505050"/>
+                </a:solidFill>
+                <a:latin typeface="Arial"/>
+              </a:defRPr>
+            </a:pPr>
+            <a:r>
+              <a:t>Явное описание интеграционных потоков по п. 4.2 ТЗ</a:t>
+            </a:r>
+          </a:p>
+        </p:txBody>
+      </p:sp>
+      <p:graphicFrame>
+        <p:nvGraphicFramePr>
+          <p:cNvPr id="4" name="Table 3"/>
+          <p:cNvGraphicFramePr>
+            <a:graphicFrameLocks noGrp="1"/>
+          </p:cNvGraphicFramePr>
+          <p:nvPr/>
+        </p:nvGraphicFramePr>
+        <p:xfrm>
+          <a:off x="411480" y="1234440"/>
+          <a:ext cx="11384280" cy="3886200"/>
+        </p:xfrm>
+        <a:graphic>
+          <a:graphicData uri="http://schemas.openxmlformats.org/drawingml/2006/table">
+            <a:tbl>
+              <a:tblPr firstRow="1" bandRow="1">
+                <a:tableStyleId>{5C22544A-7EE6-4342-B048-85BDC9FD1C3A}</a:tableStyleId>
+              </a:tblPr>
+              <a:tblGrid>
+                <a:gridCol w="2103120"/>
+                <a:gridCol w="1600200"/>
+                <a:gridCol w="2788920"/>
+                <a:gridCol w="2331720"/>
+                <a:gridCol w="2560320"/>
+              </a:tblGrid>
+              <a:tr h="777240">
+                <a:tc>
+                  <a:txBody>
+                    <a:bodyPr/>
+                    <a:lstStyle/>
+                    <a:p>
+                      <a:pPr>
+                        <a:defRPr b="1" sz="1000">
+                          <a:latin typeface="Arial"/>
+                        </a:defRPr>
+                      </a:pPr>
+                      <a:r>
+                        <a:t>Поток</a:t>
+                      </a:r>
+                    </a:p>
+                  </a:txBody>
+                  <a:tcPr/>
+                </a:tc>
+                <a:tc>
+                  <a:txBody>
+                    <a:bodyPr/>
+                    <a:lstStyle/>
+                    <a:p>
+                      <a:pPr>
+                        <a:defRPr b="1" sz="1000">
+                          <a:latin typeface="Arial"/>
+                        </a:defRPr>
+                      </a:pPr>
+                      <a:r>
+                        <a:t>Порт/путь</a:t>
+                      </a:r>
+                    </a:p>
+                  </a:txBody>
+                  <a:tcPr/>
+                </a:tc>
+                <a:tc>
+                  <a:txBody>
+                    <a:bodyPr/>
+                    <a:lstStyle/>
+                    <a:p>
+                      <a:pPr>
+                        <a:defRPr b="1" sz="1000">
+                          <a:latin typeface="Arial"/>
+                        </a:defRPr>
+                      </a:pPr>
+                      <a:r>
+                        <a:t>Протокол</a:t>
+                      </a:r>
+                    </a:p>
+                  </a:txBody>
+                  <a:tcPr/>
+                </a:tc>
+                <a:tc>
+                  <a:txBody>
+                    <a:bodyPr/>
+                    <a:lstStyle/>
+                    <a:p>
+                      <a:pPr>
+                        <a:defRPr b="1" sz="1000">
+                          <a:latin typeface="Arial"/>
+                        </a:defRPr>
+                      </a:pPr>
+                      <a:r>
+                        <a:t>Назначение</a:t>
+                      </a:r>
+                    </a:p>
+                  </a:txBody>
+                  <a:tcPr/>
+                </a:tc>
+                <a:tc>
+                  <a:txBody>
+                    <a:bodyPr/>
+                    <a:lstStyle/>
+                    <a:p>
+                      <a:pPr>
+                        <a:defRPr b="1" sz="1000">
+                          <a:latin typeface="Arial"/>
+                        </a:defRPr>
+                      </a:pPr>
+                      <a:r>
+                        <a:t>Ограничение</a:t>
+                      </a:r>
+                    </a:p>
+                  </a:txBody>
+                  <a:tcPr/>
+                </a:tc>
+              </a:tr>
+              <a:tr h="777240">
+                <a:tc>
+                  <a:txBody>
+                    <a:bodyPr/>
+                    <a:lstStyle/>
+                    <a:p>
+                      <a:pPr>
+                        <a:defRPr sz="900">
+                          <a:latin typeface="Arial"/>
+                        </a:defRPr>
+                      </a:pPr>
+                      <a:r>
+                        <a:t>PyQt6 GUI → FastAPI</a:t>
+                      </a:r>
+                    </a:p>
+                  </a:txBody>
+                  <a:tcPr/>
+                </a:tc>
+                <a:tc>
+                  <a:txBody>
+                    <a:bodyPr/>
+                    <a:lstStyle/>
+                    <a:p>
+                      <a:pPr>
+                        <a:defRPr sz="900">
+                          <a:latin typeface="Arial"/>
+                        </a:defRPr>
+                      </a:pPr>
+                      <a:r>
+                        <a:t>8000</a:t>
+                      </a:r>
+                    </a:p>
+                  </a:txBody>
+                  <a:tcPr/>
+                </a:tc>
+                <a:tc>
+                  <a:txBody>
+                    <a:bodyPr/>
+                    <a:lstStyle/>
+                    <a:p>
+                      <a:pPr>
+                        <a:defRPr sz="900">
+                          <a:latin typeface="Arial"/>
+                        </a:defRPr>
+                      </a:pPr>
+                      <a:r>
+                        <a:t>HTTP/JSON локально; HTTPS/JSON для сети</a:t>
+                      </a:r>
+                    </a:p>
+                  </a:txBody>
+                  <a:tcPr/>
+                </a:tc>
+                <a:tc>
+                  <a:txBody>
+                    <a:bodyPr/>
+                    <a:lstStyle/>
+                    <a:p>
+                      <a:pPr>
+                        <a:defRPr sz="900">
+                          <a:latin typeface="Arial"/>
+                        </a:defRPr>
+                      </a:pPr>
+                      <a:r>
+                        <a:t>Auth, calc, audit, export</a:t>
+                      </a:r>
+                    </a:p>
+                  </a:txBody>
+                  <a:tcPr/>
+                </a:tc>
+                <a:tc>
+                  <a:txBody>
+                    <a:bodyPr/>
+                    <a:lstStyle/>
+                    <a:p>
+                      <a:pPr>
+                        <a:defRPr sz="900">
+                          <a:latin typeface="Arial"/>
+                        </a:defRPr>
+                      </a:pPr>
+                      <a:r>
+                        <a:t>Для сети задать TLS cert/key</a:t>
+                      </a:r>
+                    </a:p>
+                  </a:txBody>
+                  <a:tcPr/>
+                </a:tc>
+              </a:tr>
+              <a:tr h="777240">
+                <a:tc>
+                  <a:txBody>
+                    <a:bodyPr/>
+                    <a:lstStyle/>
+                    <a:p>
+                      <a:pPr>
+                        <a:defRPr sz="900">
+                          <a:latin typeface="Arial"/>
+                        </a:defRPr>
+                      </a:pPr>
+                      <a:r>
+                        <a:t>FastAPI → SQLite</a:t>
+                      </a:r>
+                    </a:p>
+                  </a:txBody>
+                  <a:tcPr/>
+                </a:tc>
+                <a:tc>
+                  <a:txBody>
+                    <a:bodyPr/>
+                    <a:lstStyle/>
+                    <a:p>
+                      <a:pPr>
+                        <a:defRPr sz="900">
+                          <a:latin typeface="Arial"/>
+                        </a:defRPr>
+                      </a:pPr>
+                      <a:r>
+                        <a:t>data/*.sqlite3</a:t>
+                      </a:r>
+                    </a:p>
+                  </a:txBody>
+                  <a:tcPr/>
+                </a:tc>
+                <a:tc>
+                  <a:txBody>
+                    <a:bodyPr/>
+                    <a:lstStyle/>
+                    <a:p>
+                      <a:pPr>
+                        <a:defRPr sz="900">
+                          <a:latin typeface="Arial"/>
+                        </a:defRPr>
+                      </a:pPr>
+                      <a:r>
+                        <a:t>SQLite API</a:t>
+                      </a:r>
+                    </a:p>
+                  </a:txBody>
+                  <a:tcPr/>
+                </a:tc>
+                <a:tc>
+                  <a:txBody>
+                    <a:bodyPr/>
+                    <a:lstStyle/>
+                    <a:p>
+                      <a:pPr>
+                        <a:defRPr sz="900">
+                          <a:latin typeface="Arial"/>
+                        </a:defRPr>
+                      </a:pPr>
+                      <a:r>
+                        <a:t>users/history/audit</a:t>
+                      </a:r>
+                    </a:p>
+                  </a:txBody>
+                  <a:tcPr/>
+                </a:tc>
+                <a:tc>
+                  <a:txBody>
+                    <a:bodyPr/>
+                    <a:lstStyle/>
+                    <a:p>
+                      <a:pPr>
+                        <a:defRPr sz="900">
+                          <a:latin typeface="Arial"/>
+                        </a:defRPr>
+                      </a:pPr>
+                      <a:r>
+                        <a:t>WAL + busy_timeout</a:t>
+                      </a:r>
+                    </a:p>
+                  </a:txBody>
+                  <a:tcPr/>
+                </a:tc>
+              </a:tr>
+              <a:tr h="777240">
+                <a:tc>
+                  <a:txBody>
+                    <a:bodyPr/>
+                    <a:lstStyle/>
+                    <a:p>
+                      <a:pPr>
+                        <a:defRPr sz="900">
+                          <a:latin typeface="Arial"/>
+                        </a:defRPr>
+                      </a:pPr>
+                      <a:r>
+                        <a:t>FastAPI → files</a:t>
+                      </a:r>
+                    </a:p>
+                  </a:txBody>
+                  <a:tcPr/>
+                </a:tc>
+                <a:tc>
+                  <a:txBody>
+                    <a:bodyPr/>
+                    <a:lstStyle/>
+                    <a:p>
+                      <a:pPr>
+                        <a:defRPr sz="900">
+                          <a:latin typeface="Arial"/>
+                        </a:defRPr>
+                      </a:pPr>
+                      <a:r>
+                        <a:t>logs/, exports/, data/</a:t>
+                      </a:r>
+                    </a:p>
+                  </a:txBody>
+                  <a:tcPr/>
+                </a:tc>
+                <a:tc>
+                  <a:txBody>
+                    <a:bodyPr/>
+                    <a:lstStyle/>
+                    <a:p>
+                      <a:pPr>
+                        <a:defRPr sz="900">
+                          <a:latin typeface="Arial"/>
+                        </a:defRPr>
+                      </a:pPr>
+                      <a:r>
+                        <a:t>File I/O</a:t>
+                      </a:r>
+                    </a:p>
+                  </a:txBody>
+                  <a:tcPr/>
+                </a:tc>
+                <a:tc>
+                  <a:txBody>
+                    <a:bodyPr/>
+                    <a:lstStyle/>
+                    <a:p>
+                      <a:pPr>
+                        <a:defRPr sz="900">
+                          <a:latin typeface="Arial"/>
+                        </a:defRPr>
+                      </a:pPr>
+                      <a:r>
+                        <a:t>audit.log, CSV/PPTX, initial admin creds</a:t>
+                      </a:r>
+                    </a:p>
+                  </a:txBody>
+                  <a:tcPr/>
+                </a:tc>
+                <a:tc>
+                  <a:txBody>
+                    <a:bodyPr/>
+                    <a:lstStyle/>
+                    <a:p>
+                      <a:pPr>
+                        <a:defRPr sz="900">
+                          <a:latin typeface="Arial"/>
+                        </a:defRPr>
+                      </a:pPr>
+                      <a:r>
+                        <a:t>Ограничить права доступа</a:t>
+                      </a:r>
+                    </a:p>
+                  </a:txBody>
+                  <a:tcPr/>
+                </a:tc>
+              </a:tr>
+              <a:tr h="777240">
+                <a:tc>
+                  <a:txBody>
+                    <a:bodyPr/>
+                    <a:lstStyle/>
+                    <a:p>
+                      <a:pPr>
+                        <a:defRPr sz="900">
+                          <a:latin typeface="Arial"/>
+                        </a:defRPr>
+                      </a:pPr>
+                      <a:r>
+                        <a:t>FastAPI → Remote audit</a:t>
+                      </a:r>
+                    </a:p>
+                  </a:txBody>
+                  <a:tcPr/>
+                </a:tc>
+                <a:tc>
+                  <a:txBody>
+                    <a:bodyPr/>
+                    <a:lstStyle/>
+                    <a:p>
+                      <a:pPr>
+                        <a:defRPr sz="900">
+                          <a:latin typeface="Arial"/>
+                        </a:defRPr>
+                      </a:pPr>
+                      <a:r>
+                        <a:t>ENERGY_AUDIT_REMOTE_URL</a:t>
+                      </a:r>
+                    </a:p>
+                  </a:txBody>
+                  <a:tcPr/>
+                </a:tc>
+                <a:tc>
+                  <a:txBody>
+                    <a:bodyPr/>
+                    <a:lstStyle/>
+                    <a:p>
+                      <a:pPr>
+                        <a:defRPr sz="900">
+                          <a:latin typeface="Arial"/>
+                        </a:defRPr>
+                      </a:pPr>
+                      <a:r>
+                        <a:t>HTTP(S) POST JSON</a:t>
+                      </a:r>
+                    </a:p>
+                  </a:txBody>
+                  <a:tcPr/>
+                </a:tc>
+                <a:tc>
+                  <a:txBody>
+                    <a:bodyPr/>
+                    <a:lstStyle/>
+                    <a:p>
+                      <a:pPr>
+                        <a:defRPr sz="900">
+                          <a:latin typeface="Arial"/>
+                        </a:defRPr>
+                      </a:pPr>
+                      <a:r>
+                        <a:t>Удалённый сбор событий</a:t>
+                      </a:r>
+                    </a:p>
+                  </a:txBody>
+                  <a:tcPr/>
+                </a:tc>
+                <a:tc>
+                  <a:txBody>
+                    <a:bodyPr/>
+                    <a:lstStyle/>
+                    <a:p>
+                      <a:pPr>
+                        <a:defRPr sz="900">
+                          <a:latin typeface="Arial"/>
+                        </a:defRPr>
+                      </a:pPr>
+                      <a:r>
+                        <a:t>Очередь, не блокирует API</a:t>
+                      </a:r>
+                    </a:p>
+                  </a:txBody>
+                  <a:tcPr/>
+                </a:tc>
+              </a:tr>
+            </a:tbl>
+          </a:graphicData>
+        </a:graphic>
+      </p:graphicFrame>
+    </p:spTree>
+  </p:cSld>
+  <p:clrMapOvr>
+    <a:masterClrMapping/>
+  </p:clrMapOvr>
+</p:sld>
+</file>
+
+<file path=ppt/slides/slide7.xml><?xml version="1.0" encoding="utf-8"?>
+<p:sld xmlns:a="http://schemas.openxmlformats.org/drawingml/2006/main" xmlns:p="http://schemas.openxmlformats.org/presentationml/2006/main" xmlns:r="http://schemas.openxmlformats.org/officeDocument/2006/relationships">
+  <p:cSld>
+    <p:spTree>
+      <p:nvGrpSpPr>
+        <p:cNvPr id="1" name=""/>
+        <p:cNvGrpSpPr/>
+        <p:nvPr/>
+      </p:nvGrpSpPr>
+      <p:grpSpPr/>
+      <p:sp>
+        <p:nvSpPr>
+          <p:cNvPr id="2" name="TextBox 1"/>
+          <p:cNvSpPr txBox="1"/>
+          <p:nvPr/>
+        </p:nvSpPr>
+        <p:spPr>
+          <a:xfrm>
+            <a:off x="502920" y="256032"/>
+            <a:ext cx="11155680" cy="594360"/>
+          </a:xfrm>
+          <a:prstGeom prst="rect">
+            <a:avLst/>
+          </a:prstGeom>
+          <a:noFill/>
+        </p:spPr>
+        <p:txBody>
+          <a:bodyPr wrap="none">
+            <a:spAutoFit/>
+          </a:bodyPr>
+          <a:lstStyle/>
+          <a:p>
+            <a:pPr>
+              <a:defRPr sz="2700" b="1">
+                <a:solidFill>
+                  <a:srgbClr val="1E1E1E"/>
+                </a:solidFill>
+                <a:latin typeface="Arial"/>
+              </a:defRPr>
+            </a:pPr>
+            <a:r>
+              <a:t>Исправления последнего code review</a:t>
+            </a:r>
+          </a:p>
+        </p:txBody>
+      </p:sp>
+      <p:sp>
+        <p:nvSpPr>
+          <p:cNvPr id="3" name="TextBox 2"/>
+          <p:cNvSpPr txBox="1"/>
+          <p:nvPr/>
+        </p:nvSpPr>
+        <p:spPr>
+          <a:xfrm>
+            <a:off x="548640" y="841248"/>
+            <a:ext cx="10972800" cy="365760"/>
+          </a:xfrm>
+          <a:prstGeom prst="rect">
+            <a:avLst/>
+          </a:prstGeom>
+          <a:noFill/>
+        </p:spPr>
+        <p:txBody>
+          <a:bodyPr wrap="none">
+            <a:spAutoFit/>
+          </a:bodyPr>
+          <a:lstStyle/>
+          <a:p>
+            <a:pPr>
+              <a:defRPr sz="1400">
+                <a:solidFill>
+                  <a:srgbClr val="505050"/>
+                </a:solidFill>
+                <a:latin typeface="Arial"/>
+              </a:defRPr>
+            </a:pPr>
+            <a:r>
+              <a:t>Закрыты критические и высокоприоритетные замечания</a:t>
+            </a:r>
+          </a:p>
+        </p:txBody>
+      </p:sp>
+      <p:sp>
+        <p:nvSpPr>
+          <p:cNvPr id="4" name="TextBox 3"/>
+          <p:cNvSpPr txBox="1"/>
+          <p:nvPr/>
+        </p:nvSpPr>
+        <p:spPr>
+          <a:xfrm>
+            <a:off x="731520" y="1234440"/>
+            <a:ext cx="10881360" cy="5303520"/>
+          </a:xfrm>
+          <a:prstGeom prst="rect">
+            <a:avLst/>
+          </a:prstGeom>
+          <a:noFill/>
+        </p:spPr>
+        <p:txBody>
+          <a:bodyPr wrap="none">
+            <a:spAutoFit/>
+          </a:bodyPr>
+          <a:lstStyle/>
+          <a:p>
+            <a:pPr>
+              <a:spcAft>
+                <a:spcPts val="600"/>
+              </a:spcAft>
+              <a:defRPr sz="1900">
+                <a:latin typeface="Arial"/>
+              </a:defRPr>
+            </a:pPr>
+            <a:r>
+              <a:t>Whitelist спецсимволов пароля; пробельные символы запрещены.</a:t>
+            </a:r>
+          </a:p>
+          <a:p>
+            <a:pPr>
+              <a:spcAft>
+                <a:spcPts val="600"/>
+              </a:spcAft>
+              <a:defRPr sz="1900">
+                <a:latin typeface="Arial"/>
+              </a:defRPr>
+            </a:pPr>
+            <a:r>
+              <a:t>Remote audit вынесен в неблокирующую очередь с daemon worker.</a:t>
+            </a:r>
+          </a:p>
+          <a:p>
+            <a:pPr>
+              <a:spcAft>
+                <a:spcPts val="600"/>
+              </a:spcAft>
+              <a:defRPr sz="1900">
+                <a:latin typeface="Arial"/>
+              </a:defRPr>
+            </a:pPr>
+            <a:r>
+              <a:t>GUI отправляет logout при закрытии главного окна.</a:t>
+            </a:r>
+          </a:p>
+          <a:p>
+            <a:pPr>
+              <a:spcAft>
+                <a:spcPts val="600"/>
+              </a:spcAft>
+              <a:defRPr sz="1900">
+                <a:latin typeface="Arial"/>
+              </a:defRPr>
+            </a:pPr>
+            <a:r>
+              <a:t>Файловый audit log содержит sequence_number из SQLite.</a:t>
+            </a:r>
+          </a:p>
+          <a:p>
+            <a:pPr>
+              <a:spcAft>
+                <a:spcPts val="600"/>
+              </a:spcAft>
+              <a:defRPr sz="1900">
+                <a:latin typeface="Arial"/>
+              </a:defRPr>
+            </a:pPr>
+            <a:r>
+              <a:t>SQLite включён в WAL-режим; роли переведены на enum UserRole.</a:t>
+            </a:r>
+          </a:p>
+          <a:p>
+            <a:pPr>
+              <a:spcAft>
+                <a:spcPts val="600"/>
+              </a:spcAft>
+              <a:defRPr sz="1900">
+                <a:latin typeface="Arial"/>
+              </a:defRPr>
+            </a:pPr>
+            <a:r>
+              <a:t>ApiClient разделён на Auth/Calc/Audit/Export клиенты.</a:t>
+            </a:r>
+          </a:p>
+          <a:p>
+            <a:pPr>
+              <a:spcAft>
+                <a:spcPts val="600"/>
+              </a:spcAft>
+              <a:defRPr sz="1900">
+                <a:latin typeface="Arial"/>
+              </a:defRPr>
+            </a:pPr>
+            <a:r>
+              <a:t>Pydantic-схема валидирует temp_c на границе API.</a:t>
+            </a:r>
+          </a:p>
+          <a:p>
+            <a:pPr>
+              <a:spcAft>
+                <a:spcPts val="600"/>
+              </a:spcAft>
+              <a:defRPr sz="1900">
+                <a:latin typeface="Arial"/>
+              </a:defRPr>
+            </a:pPr>
+            <a:r>
+              <a:t>Ограничение in-memory SessionManager описано в README/ARCHITECTURE.</a:t>
             </a:r>
           </a:p>
         </p:txBody>

--- a/docs/presentation/architecture_overview.pptx
+++ b/docs/presentation/architecture_overview.pptx
@@ -12,6 +12,8 @@
     <p:sldId id="260" r:id="rId11"/>
     <p:sldId id="261" r:id="rId12"/>
     <p:sldId id="262" r:id="rId13"/>
+    <p:sldId id="263" r:id="rId14"/>
+    <p:sldId id="264" r:id="rId15"/>
   </p:sldIdLst>
   <p:sldSz cx="12191695" cy="6858000" type="screen4x3"/>
   <p:notesSz cx="6858000" cy="9144000"/>
@@ -4484,6 +4486,579 @@
 </p:sld>
 </file>
 
+<file path=ppt/slides/slide8.xml><?xml version="1.0" encoding="utf-8"?>
+<p:sld xmlns:a="http://schemas.openxmlformats.org/drawingml/2006/main" xmlns:p="http://schemas.openxmlformats.org/presentationml/2006/main" xmlns:r="http://schemas.openxmlformats.org/officeDocument/2006/relationships">
+  <p:cSld>
+    <p:spTree>
+      <p:nvGrpSpPr>
+        <p:cNvPr id="1" name=""/>
+        <p:cNvGrpSpPr/>
+        <p:nvPr/>
+      </p:nvGrpSpPr>
+      <p:grpSpPr/>
+      <p:sp>
+        <p:nvSpPr>
+          <p:cNvPr id="2" name="TextBox 1"/>
+          <p:cNvSpPr txBox="1"/>
+          <p:nvPr/>
+        </p:nvSpPr>
+        <p:spPr>
+          <a:xfrm>
+            <a:off x="502920" y="256032"/>
+            <a:ext cx="11155680" cy="594360"/>
+          </a:xfrm>
+          <a:prstGeom prst="rect">
+            <a:avLst/>
+          </a:prstGeom>
+          <a:noFill/>
+        </p:spPr>
+        <p:txBody>
+          <a:bodyPr wrap="none">
+            <a:spAutoFit/>
+          </a:bodyPr>
+          <a:lstStyle/>
+          <a:p>
+            <a:pPr>
+              <a:defRPr sz="2700" b="1">
+                <a:solidFill>
+                  <a:srgbClr val="1E1E1E"/>
+                </a:solidFill>
+                <a:latin typeface="Arial"/>
+              </a:defRPr>
+            </a:pPr>
+            <a:r>
+              <a:t>Исправления code review v2</a:t>
+            </a:r>
+          </a:p>
+        </p:txBody>
+      </p:sp>
+      <p:sp>
+        <p:nvSpPr>
+          <p:cNvPr id="3" name="TextBox 2"/>
+          <p:cNvSpPr txBox="1"/>
+          <p:nvPr/>
+        </p:nvSpPr>
+        <p:spPr>
+          <a:xfrm>
+            <a:off x="548640" y="841248"/>
+            <a:ext cx="10972800" cy="365760"/>
+          </a:xfrm>
+          <a:prstGeom prst="rect">
+            <a:avLst/>
+          </a:prstGeom>
+          <a:noFill/>
+        </p:spPr>
+        <p:txBody>
+          <a:bodyPr wrap="none">
+            <a:spAutoFit/>
+          </a:bodyPr>
+          <a:lstStyle/>
+          <a:p>
+            <a:pPr>
+              <a:defRPr sz="1400">
+                <a:solidFill>
+                  <a:srgbClr val="505050"/>
+                </a:solidFill>
+                <a:latin typeface="Arial"/>
+              </a:defRPr>
+            </a:pPr>
+            <a:r>
+              <a:t>Закрыт новый критический баг и два новых предупреждения</a:t>
+            </a:r>
+          </a:p>
+        </p:txBody>
+      </p:sp>
+      <p:sp>
+        <p:nvSpPr>
+          <p:cNvPr id="4" name="TextBox 3"/>
+          <p:cNvSpPr txBox="1"/>
+          <p:nvPr/>
+        </p:nvSpPr>
+        <p:spPr>
+          <a:xfrm>
+            <a:off x="731520" y="1234440"/>
+            <a:ext cx="10789920" cy="5303520"/>
+          </a:xfrm>
+          <a:prstGeom prst="rect">
+            <a:avLst/>
+          </a:prstGeom>
+          <a:noFill/>
+        </p:spPr>
+        <p:txBody>
+          <a:bodyPr wrap="none">
+            <a:spAutoFit/>
+          </a:bodyPr>
+          <a:lstStyle/>
+          <a:p>
+            <a:pPr>
+              <a:spcAft>
+                <a:spcPts val="600"/>
+              </a:spcAft>
+              <a:defRPr sz="2000">
+                <a:latin typeface="Arial"/>
+              </a:defRPr>
+            </a:pPr>
+            <a:r>
+              <a:t>AuthenticatedUser.is_admin больше не использует UserRole(str(role)); сравнение выполняется через .value.</a:t>
+            </a:r>
+          </a:p>
+          <a:p>
+            <a:pPr>
+              <a:spcAft>
+                <a:spcPts val="600"/>
+              </a:spcAft>
+              <a:defRPr sz="2000">
+                <a:latin typeface="Arial"/>
+              </a:defRPr>
+            </a:pPr>
+            <a:r>
+              <a:t>AuditEvent.remote_sent удалён как мёртвое поле; актуальное поле — remote_queued.</a:t>
+            </a:r>
+          </a:p>
+          <a:p>
+            <a:pPr>
+              <a:spcAft>
+                <a:spcPts val="600"/>
+              </a:spcAft>
+              <a:defRPr sz="2000">
+                <a:latin typeface="Arial"/>
+              </a:defRPr>
+            </a:pPr>
+            <a:r>
+              <a:t>Logout вынесен в _do_logout(); меню «Выйти» вызывает _do_logout_and_close() явно.</a:t>
+            </a:r>
+          </a:p>
+          <a:p>
+            <a:pPr>
+              <a:spcAft>
+                <a:spcPts val="600"/>
+              </a:spcAft>
+              <a:defRPr sz="2000">
+                <a:latin typeface="Arial"/>
+              </a:defRPr>
+            </a:pPr>
+            <a:r>
+              <a:t>audit_event() декомпозирован на sink-цепочку: SQLiteAuditSink → RemoteQueueAuditSink → FileAuditSink.</a:t>
+            </a:r>
+          </a:p>
+          <a:p>
+            <a:pPr>
+              <a:spcAft>
+                <a:spcPts val="600"/>
+              </a:spcAft>
+              <a:defRPr sz="2000">
+                <a:latin typeface="Arial"/>
+              </a:defRPr>
+            </a:pPr>
+            <a:r>
+              <a:t>AuthService теперь зависит от протокола IUserRepository, а не от конкретного UserRepository.</a:t>
+            </a:r>
+          </a:p>
+          <a:p>
+            <a:pPr>
+              <a:spcAft>
+                <a:spcPts val="600"/>
+              </a:spcAft>
+              <a:defRPr sz="2000">
+                <a:latin typeface="Arial"/>
+              </a:defRPr>
+            </a:pPr>
+            <a:r>
+              <a:t>Тесты: 46 passed.</a:t>
+            </a:r>
+          </a:p>
+        </p:txBody>
+      </p:sp>
+    </p:spTree>
+  </p:cSld>
+  <p:clrMapOvr>
+    <a:masterClrMapping/>
+  </p:clrMapOvr>
+</p:sld>
+</file>
+
+<file path=ppt/slides/slide9.xml><?xml version="1.0" encoding="utf-8"?>
+<p:sld xmlns:a="http://schemas.openxmlformats.org/drawingml/2006/main" xmlns:p="http://schemas.openxmlformats.org/presentationml/2006/main" xmlns:r="http://schemas.openxmlformats.org/officeDocument/2006/relationships">
+  <p:cSld>
+    <p:spTree>
+      <p:nvGrpSpPr>
+        <p:cNvPr id="1" name=""/>
+        <p:cNvGrpSpPr/>
+        <p:nvPr/>
+      </p:nvGrpSpPr>
+      <p:grpSpPr/>
+      <p:sp>
+        <p:nvSpPr>
+          <p:cNvPr id="2" name="TextBox 1"/>
+          <p:cNvSpPr txBox="1"/>
+          <p:nvPr/>
+        </p:nvSpPr>
+        <p:spPr>
+          <a:xfrm>
+            <a:off x="502920" y="256032"/>
+            <a:ext cx="11155680" cy="594360"/>
+          </a:xfrm>
+          <a:prstGeom prst="rect">
+            <a:avLst/>
+          </a:prstGeom>
+          <a:noFill/>
+        </p:spPr>
+        <p:txBody>
+          <a:bodyPr wrap="none">
+            <a:spAutoFit/>
+          </a:bodyPr>
+          <a:lstStyle/>
+          <a:p>
+            <a:pPr>
+              <a:defRPr sz="2700" b="1">
+                <a:solidFill>
+                  <a:srgbClr val="1E1E1E"/>
+                </a:solidFill>
+                <a:latin typeface="Arial"/>
+              </a:defRPr>
+            </a:pPr>
+            <a:r>
+              <a:t>Обновленная архитектура аудита</a:t>
+            </a:r>
+          </a:p>
+        </p:txBody>
+      </p:sp>
+      <p:sp>
+        <p:nvSpPr>
+          <p:cNvPr id="3" name="TextBox 2"/>
+          <p:cNvSpPr txBox="1"/>
+          <p:nvPr/>
+        </p:nvSpPr>
+        <p:spPr>
+          <a:xfrm>
+            <a:off x="548640" y="841248"/>
+            <a:ext cx="10972800" cy="365760"/>
+          </a:xfrm>
+          <a:prstGeom prst="rect">
+            <a:avLst/>
+          </a:prstGeom>
+          <a:noFill/>
+        </p:spPr>
+        <p:txBody>
+          <a:bodyPr wrap="none">
+            <a:spAutoFit/>
+          </a:bodyPr>
+          <a:lstStyle/>
+          <a:p>
+            <a:pPr>
+              <a:defRPr sz="1400">
+                <a:solidFill>
+                  <a:srgbClr val="505050"/>
+                </a:solidFill>
+                <a:latin typeface="Arial"/>
+              </a:defRPr>
+            </a:pPr>
+            <a:r>
+              <a:t>SRP-улучшение: форматирование события отделено от каналов записи</a:t>
+            </a:r>
+          </a:p>
+        </p:txBody>
+      </p:sp>
+      <p:graphicFrame>
+        <p:nvGraphicFramePr>
+          <p:cNvPr id="4" name="Table 3"/>
+          <p:cNvGraphicFramePr>
+            <a:graphicFrameLocks noGrp="1"/>
+          </p:cNvGraphicFramePr>
+          <p:nvPr/>
+        </p:nvGraphicFramePr>
+        <p:xfrm>
+          <a:off x="731520" y="1325880"/>
+          <a:ext cx="10698480" cy="3474720"/>
+        </p:xfrm>
+        <a:graphic>
+          <a:graphicData uri="http://schemas.openxmlformats.org/drawingml/2006/table">
+            <a:tbl>
+              <a:tblPr firstRow="1" bandRow="1">
+                <a:tableStyleId>{5C22544A-7EE6-4342-B048-85BDC9FD1C3A}</a:tableStyleId>
+              </a:tblPr>
+              <a:tblGrid>
+                <a:gridCol w="2468880"/>
+                <a:gridCol w="4663440"/>
+                <a:gridCol w="3566160"/>
+              </a:tblGrid>
+              <a:tr h="694944">
+                <a:tc>
+                  <a:txBody>
+                    <a:bodyPr/>
+                    <a:lstStyle/>
+                    <a:p>
+                      <a:pPr>
+                        <a:defRPr b="1" sz="1100">
+                          <a:latin typeface="Arial"/>
+                        </a:defRPr>
+                      </a:pPr>
+                      <a:r>
+                        <a:t>Sink</a:t>
+                      </a:r>
+                    </a:p>
+                  </a:txBody>
+                  <a:tcPr/>
+                </a:tc>
+                <a:tc>
+                  <a:txBody>
+                    <a:bodyPr/>
+                    <a:lstStyle/>
+                    <a:p>
+                      <a:pPr>
+                        <a:defRPr b="1" sz="1100">
+                          <a:latin typeface="Arial"/>
+                        </a:defRPr>
+                      </a:pPr>
+                      <a:r>
+                        <a:t>Ответственность</a:t>
+                      </a:r>
+                    </a:p>
+                  </a:txBody>
+                  <a:tcPr/>
+                </a:tc>
+                <a:tc>
+                  <a:txBody>
+                    <a:bodyPr/>
+                    <a:lstStyle/>
+                    <a:p>
+                      <a:pPr>
+                        <a:defRPr b="1" sz="1100">
+                          <a:latin typeface="Arial"/>
+                        </a:defRPr>
+                      </a:pPr>
+                      <a:r>
+                        <a:t>Результат</a:t>
+                      </a:r>
+                    </a:p>
+                  </a:txBody>
+                  <a:tcPr/>
+                </a:tc>
+              </a:tr>
+              <a:tr h="694944">
+                <a:tc>
+                  <a:txBody>
+                    <a:bodyPr/>
+                    <a:lstStyle/>
+                    <a:p>
+                      <a:pPr>
+                        <a:defRPr sz="1000">
+                          <a:latin typeface="Arial"/>
+                        </a:defRPr>
+                      </a:pPr>
+                      <a:r>
+                        <a:t>SQLiteAuditSink</a:t>
+                      </a:r>
+                    </a:p>
+                  </a:txBody>
+                  <a:tcPr/>
+                </a:tc>
+                <a:tc>
+                  <a:txBody>
+                    <a:bodyPr/>
+                    <a:lstStyle/>
+                    <a:p>
+                      <a:pPr>
+                        <a:defRPr sz="1000">
+                          <a:latin typeface="Arial"/>
+                        </a:defRPr>
+                      </a:pPr>
+                      <a:r>
+                        <a:t>Запись события в SQLite</a:t>
+                      </a:r>
+                    </a:p>
+                  </a:txBody>
+                  <a:tcPr/>
+                </a:tc>
+                <a:tc>
+                  <a:txBody>
+                    <a:bodyPr/>
+                    <a:lstStyle/>
+                    <a:p>
+                      <a:pPr>
+                        <a:defRPr sz="1000">
+                          <a:latin typeface="Arial"/>
+                        </a:defRPr>
+                      </a:pPr>
+                      <a:r>
+                        <a:t>sequence_number</a:t>
+                      </a:r>
+                    </a:p>
+                  </a:txBody>
+                  <a:tcPr/>
+                </a:tc>
+              </a:tr>
+              <a:tr h="694944">
+                <a:tc>
+                  <a:txBody>
+                    <a:bodyPr/>
+                    <a:lstStyle/>
+                    <a:p>
+                      <a:pPr>
+                        <a:defRPr sz="1000">
+                          <a:latin typeface="Arial"/>
+                        </a:defRPr>
+                      </a:pPr>
+                      <a:r>
+                        <a:t>RemoteQueueAuditSink</a:t>
+                      </a:r>
+                    </a:p>
+                  </a:txBody>
+                  <a:tcPr/>
+                </a:tc>
+                <a:tc>
+                  <a:txBody>
+                    <a:bodyPr/>
+                    <a:lstStyle/>
+                    <a:p>
+                      <a:pPr>
+                        <a:defRPr sz="1000">
+                          <a:latin typeface="Arial"/>
+                        </a:defRPr>
+                      </a:pPr>
+                      <a:r>
+                        <a:t>Постановка в неблокирующую очередь</a:t>
+                      </a:r>
+                    </a:p>
+                  </a:txBody>
+                  <a:tcPr/>
+                </a:tc>
+                <a:tc>
+                  <a:txBody>
+                    <a:bodyPr/>
+                    <a:lstStyle/>
+                    <a:p>
+                      <a:pPr>
+                        <a:defRPr sz="1000">
+                          <a:latin typeface="Arial"/>
+                        </a:defRPr>
+                      </a:pPr>
+                      <a:r>
+                        <a:t>remote_queued</a:t>
+                      </a:r>
+                    </a:p>
+                  </a:txBody>
+                  <a:tcPr/>
+                </a:tc>
+              </a:tr>
+              <a:tr h="694944">
+                <a:tc>
+                  <a:txBody>
+                    <a:bodyPr/>
+                    <a:lstStyle/>
+                    <a:p>
+                      <a:pPr>
+                        <a:defRPr sz="1000">
+                          <a:latin typeface="Arial"/>
+                        </a:defRPr>
+                      </a:pPr>
+                      <a:r>
+                        <a:t>FileAuditSink</a:t>
+                      </a:r>
+                    </a:p>
+                  </a:txBody>
+                  <a:tcPr/>
+                </a:tc>
+                <a:tc>
+                  <a:txBody>
+                    <a:bodyPr/>
+                    <a:lstStyle/>
+                    <a:p>
+                      <a:pPr>
+                        <a:defRPr sz="1000">
+                          <a:latin typeface="Arial"/>
+                        </a:defRPr>
+                      </a:pPr>
+                      <a:r>
+                        <a:t>Запись итогового события в audit.log</a:t>
+                      </a:r>
+                    </a:p>
+                  </a:txBody>
+                  <a:tcPr/>
+                </a:tc>
+                <a:tc>
+                  <a:txBody>
+                    <a:bodyPr/>
+                    <a:lstStyle/>
+                    <a:p>
+                      <a:pPr>
+                        <a:defRPr sz="1000">
+                          <a:latin typeface="Arial"/>
+                        </a:defRPr>
+                      </a:pPr>
+                      <a:r>
+                        <a:t>JSON с ротацией</a:t>
+                      </a:r>
+                    </a:p>
+                  </a:txBody>
+                  <a:tcPr/>
+                </a:tc>
+              </a:tr>
+              <a:tr h="694944">
+                <a:tc>
+                  <a:txBody>
+                    <a:bodyPr/>
+                    <a:lstStyle/>
+                    <a:p>
+                      <a:pPr>
+                        <a:defRPr sz="1000">
+                          <a:latin typeface="Arial"/>
+                        </a:defRPr>
+                      </a:pPr>
+                      <a:r>
+                        <a:t>audit_event()</a:t>
+                      </a:r>
+                    </a:p>
+                  </a:txBody>
+                  <a:tcPr/>
+                </a:tc>
+                <a:tc>
+                  <a:txBody>
+                    <a:bodyPr/>
+                    <a:lstStyle/>
+                    <a:p>
+                      <a:pPr>
+                        <a:defRPr sz="1000">
+                          <a:latin typeface="Arial"/>
+                        </a:defRPr>
+                      </a:pPr>
+                      <a:r>
+                        <a:t>Создание AuditEvent и проход по sinks</a:t>
+                      </a:r>
+                    </a:p>
+                  </a:txBody>
+                  <a:tcPr/>
+                </a:tc>
+                <a:tc>
+                  <a:txBody>
+                    <a:bodyPr/>
+                    <a:lstStyle/>
+                    <a:p>
+                      <a:pPr>
+                        <a:defRPr sz="1000">
+                          <a:latin typeface="Arial"/>
+                        </a:defRPr>
+                      </a:pPr>
+                      <a:r>
+                        <a:t>event_id</a:t>
+                      </a:r>
+                    </a:p>
+                  </a:txBody>
+                  <a:tcPr/>
+                </a:tc>
+              </a:tr>
+            </a:tbl>
+          </a:graphicData>
+        </a:graphic>
+      </p:graphicFrame>
+    </p:spTree>
+  </p:cSld>
+  <p:clrMapOvr>
+    <a:masterClrMapping/>
+  </p:clrMapOvr>
+</p:sld>
+</file>
+
 <file path=ppt/theme/theme1.xml><?xml version="1.0" encoding="utf-8"?>
 <a:theme xmlns:a="http://schemas.openxmlformats.org/drawingml/2006/main" name="Office Theme">
   <a:themeElements>

--- a/docs/presentation/architecture_overview.pptx
+++ b/docs/presentation/architecture_overview.pptx
@@ -14,6 +14,7 @@
     <p:sldId id="262" r:id="rId13"/>
     <p:sldId id="263" r:id="rId14"/>
     <p:sldId id="264" r:id="rId15"/>
+    <p:sldId id="265" r:id="rId16"/>
   </p:sldIdLst>
   <p:sldSz cx="12191695" cy="6858000" type="screen4x3"/>
   <p:notesSz cx="6858000" cy="9144000"/>
@@ -3293,6 +3294,148 @@
           </a:prstGeom>
         </p:spPr>
       </p:pic>
+    </p:spTree>
+  </p:cSld>
+  <p:clrMapOvr>
+    <a:masterClrMapping/>
+  </p:clrMapOvr>
+</p:sld>
+</file>
+
+<file path=ppt/slides/slide10.xml><?xml version="1.0" encoding="utf-8"?>
+<p:sld xmlns:a="http://schemas.openxmlformats.org/drawingml/2006/main" xmlns:p="http://schemas.openxmlformats.org/presentationml/2006/main" xmlns:r="http://schemas.openxmlformats.org/officeDocument/2006/relationships">
+  <p:cSld>
+    <p:spTree>
+      <p:nvGrpSpPr>
+        <p:cNvPr id="1" name=""/>
+        <p:cNvGrpSpPr/>
+        <p:nvPr/>
+      </p:nvGrpSpPr>
+      <p:grpSpPr/>
+      <p:sp>
+        <p:nvSpPr>
+          <p:cNvPr id="2" name="TextBox 1"/>
+          <p:cNvSpPr txBox="1"/>
+          <p:nvPr/>
+        </p:nvSpPr>
+        <p:spPr>
+          <a:xfrm>
+            <a:off x="502920" y="256032"/>
+            <a:ext cx="11155680" cy="594360"/>
+          </a:xfrm>
+          <a:prstGeom prst="rect">
+            <a:avLst/>
+          </a:prstGeom>
+          <a:noFill/>
+        </p:spPr>
+        <p:txBody>
+          <a:bodyPr wrap="none">
+            <a:spAutoFit/>
+          </a:bodyPr>
+          <a:lstStyle/>
+          <a:p>
+            <a:pPr>
+              <a:defRPr sz="2600" b="1">
+                <a:solidFill>
+                  <a:srgbClr val="1E1E1E"/>
+                </a:solidFill>
+                <a:latin typeface="Arial"/>
+              </a:defRPr>
+            </a:pPr>
+            <a:r>
+              <a:t>Дополнительное исправление: registry-based audit sinks</a:t>
+            </a:r>
+          </a:p>
+        </p:txBody>
+      </p:sp>
+      <p:sp>
+        <p:nvSpPr>
+          <p:cNvPr id="3" name="TextBox 2"/>
+          <p:cNvSpPr txBox="1"/>
+          <p:nvPr/>
+        </p:nvSpPr>
+        <p:spPr>
+          <a:xfrm>
+            <a:off x="731520" y="1097280"/>
+            <a:ext cx="10789920" cy="5120640"/>
+          </a:xfrm>
+          <a:prstGeom prst="rect">
+            <a:avLst/>
+          </a:prstGeom>
+          <a:noFill/>
+        </p:spPr>
+        <p:txBody>
+          <a:bodyPr wrap="none">
+            <a:spAutoFit/>
+          </a:bodyPr>
+          <a:lstStyle/>
+          <a:p>
+            <a:pPr>
+              <a:spcAft>
+                <a:spcPts val="600"/>
+              </a:spcAft>
+              <a:defRPr sz="1900">
+                <a:latin typeface="Arial"/>
+              </a:defRPr>
+            </a:pPr>
+            <a:r>
+              <a:t>Проблема: get_audit_sinks() содержал жестко захардкоженный список sink-объектов.</a:t>
+            </a:r>
+          </a:p>
+          <a:p>
+            <a:pPr>
+              <a:spcAft>
+                <a:spcPts val="600"/>
+              </a:spcAft>
+              <a:defRPr sz="1900">
+                <a:latin typeface="Arial"/>
+              </a:defRPr>
+            </a:pPr>
+            <a:r>
+              <a:t>Решение: введен реестр _AUDIT_SINK_REGISTRY и декоратор @register_audit_sink(order=...).</a:t>
+            </a:r>
+          </a:p>
+          <a:p>
+            <a:pPr>
+              <a:spcAft>
+                <a:spcPts val="600"/>
+              </a:spcAft>
+              <a:defRPr sz="1900">
+                <a:latin typeface="Arial"/>
+              </a:defRPr>
+            </a:pPr>
+            <a:r>
+              <a:t>Теперь новый канал аудита добавляется новым классом с декоратором, без правки get_audit_sinks().</a:t>
+            </a:r>
+          </a:p>
+          <a:p>
+            <a:pPr>
+              <a:spcAft>
+                <a:spcPts val="600"/>
+              </a:spcAft>
+              <a:defRPr sz="1900">
+                <a:latin typeface="Arial"/>
+              </a:defRPr>
+            </a:pPr>
+            <a:r>
+              <a:t>Порядок обработки сохраняется через параметр order: SQLite -&gt; RemoteQueue -&gt; File.</a:t>
+            </a:r>
+          </a:p>
+          <a:p>
+            <a:pPr>
+              <a:spcAft>
+                <a:spcPts val="600"/>
+              </a:spcAft>
+              <a:defRPr sz="1900">
+                <a:latin typeface="Arial"/>
+              </a:defRPr>
+            </a:pPr>
+            <a:r>
+              <a:t>Покрыто отдельным тестом; итоговая проверка проекта проходит успешно.</a:t>
+            </a:r>
+          </a:p>
+        </p:txBody>
+      </p:sp>
     </p:spTree>
   </p:cSld>
   <p:clrMapOvr>
